--- a/docs/report/Презентация.pptx
+++ b/docs/report/Презентация.pptx
@@ -271,19 +271,19 @@
                   <c:v>3.0</c:v>
                 </c:pt>
                 <c:pt idx="1">
-                  <c:v>2.61</c:v>
+                  <c:v>2.56</c:v>
                 </c:pt>
                 <c:pt idx="2">
-                  <c:v>1.84</c:v>
+                  <c:v>1.57</c:v>
                 </c:pt>
                 <c:pt idx="3">
-                  <c:v>0.77</c:v>
+                  <c:v>1.07</c:v>
                 </c:pt>
                 <c:pt idx="4">
-                  <c:v>0.44</c:v>
+                  <c:v>0.48</c:v>
                 </c:pt>
                 <c:pt idx="5">
-                  <c:v>0.16</c:v>
+                  <c:v>0.13</c:v>
                 </c:pt>
               </c:numCache>
             </c:numRef>
@@ -344,19 +344,19 @@
                   <c:v>3.0</c:v>
                 </c:pt>
                 <c:pt idx="1">
-                  <c:v>2.51</c:v>
+                  <c:v>2.65</c:v>
                 </c:pt>
                 <c:pt idx="2">
-                  <c:v>1.69</c:v>
+                  <c:v>1.52</c:v>
                 </c:pt>
                 <c:pt idx="3">
-                  <c:v>0.8</c:v>
+                  <c:v>0.81</c:v>
                 </c:pt>
                 <c:pt idx="4">
-                  <c:v>0.24</c:v>
+                  <c:v>0.43</c:v>
                 </c:pt>
                 <c:pt idx="5">
-                  <c:v>0.35</c:v>
+                  <c:v>0.19</c:v>
                 </c:pt>
               </c:numCache>
             </c:numRef>
@@ -566,16 +566,16 @@
                 <c:formatCode>General</c:formatCode>
                 <c:ptCount val="5"/>
                 <c:pt idx="0">
-                  <c:v>29.3</c:v>
+                  <c:v>30.0</c:v>
                 </c:pt>
                 <c:pt idx="1">
-                  <c:v>34.0</c:v>
+                  <c:v>39.3</c:v>
                 </c:pt>
                 <c:pt idx="2">
-                  <c:v>14.0</c:v>
+                  <c:v>19.3</c:v>
                 </c:pt>
                 <c:pt idx="3">
-                  <c:v>20.7</c:v>
+                  <c:v>9.3</c:v>
                 </c:pt>
                 <c:pt idx="4">
                   <c:v>2.0</c:v>
@@ -633,19 +633,19 @@
                 <c:formatCode>General</c:formatCode>
                 <c:ptCount val="5"/>
                 <c:pt idx="0">
-                  <c:v>42.7</c:v>
+                  <c:v>19.3</c:v>
                 </c:pt>
                 <c:pt idx="1">
-                  <c:v>29.3</c:v>
+                  <c:v>40.0</c:v>
                 </c:pt>
                 <c:pt idx="2">
-                  <c:v>19.3</c:v>
+                  <c:v>26.0</c:v>
                 </c:pt>
                 <c:pt idx="3">
-                  <c:v>8.7</c:v>
+                  <c:v>12.7</c:v>
                 </c:pt>
                 <c:pt idx="4">
-                  <c:v>0</c:v>
+                  <c:v>2.0</c:v>
                 </c:pt>
               </c:numCache>
             </c:numRef>
@@ -1245,7 +1245,7 @@
           <a:lstStyle/>
           <a:p>
             <a:r>
-              <a:t>Все 300 контрольных поисков нашли узел, которого не было в таблице инициатора, обычно за 5 запросов и 2 итерации — это согласуется с логарифмической оценкой. Все 80 сообщений доставлены через два ретранслятора. Сообщение по готовой сессии идёт около полутора миллисекунд, первое — около 15, то есть основная стоимость — установление сессии. Схема bootstrap на стоимость поиска не повлияла.</a:t>
+              <a:t>Все 300 контрольных поисков нашли узел, которого не было в таблице инициатора, обычно за 5 запросов и 2 итерации — это согласуется с логарифмической оценкой. Все 80 сообщений доставлены через два ретранслятора. Сообщение по готовой сессии идёт около 2,4 мс, первое — около 23 мс, то есть основная стоимость — установление сессии. Схема bootstrap на стоимость поиска не повлияла.</a:t>
             </a:r>
           </a:p>
         </p:txBody>
@@ -1315,7 +1315,7 @@
           <a:lstStyle/>
           <a:p>
             <a:r>
-              <a:t>Два секунды при отказе узла DHT — это стек Windows: я отдельно замерил отклонение подключения к закрытому порту, оно занимает те же две секунды. Все выбросы я разобрал по журналам: это запуск процессов и общий процессор, а не алгоритм. Модель угроз сознательно не включает Sybil и Eclipse — это продвинутый уровень.</a:t>
+              <a:t>Два секунды при отказе узла DHT — это стек Windows: я отдельно замерил отклонение подключения к закрытому порту, оно занимает те же две секунды. Выбросы я разобрал по журналам: это перезапуск узлов сценариями и общий процессор, а не алгоритм. Модель угроз сознательно не включает Sybil и Eclipse — это продвинутый уровень.</a:t>
             </a:r>
           </a:p>
         </p:txBody>
@@ -5722,7 +5722,7 @@
                 </a:solidFill>
                 <a:latin typeface="Calibri"/>
               </a:rPr>
-              <a:t>Итоговая серия, версия кода 902f68c: сырые CSV/JSON → analyze.py</a:t>
+              <a:t>Итоговая серия, версия кода 5ebcc62: сырые CSV/JSON → analyze.py</a:t>
             </a:r>
           </a:p>
         </p:txBody>
@@ -5970,7 +5970,7 @@
                 </a:solidFill>
                 <a:latin typeface="Cambria"/>
               </a:rPr>
-              <a:t>1,3 мс</a:t>
+              <a:t>2,4 мс</a:t>
             </a:r>
           </a:p>
         </p:txBody>
@@ -6006,7 +6006,7 @@
                 <a:latin typeface="Calibri"/>
               </a:rPr>
               <a:t>сообщение по сессии
-(первое — ≈15 мс)</a:t>
+(первое — 23 мс)</a:t>
             </a:r>
           </a:p>
         </p:txBody>
@@ -6520,7 +6520,7 @@
                 </a:solidFill>
                 <a:latin typeface="Calibri"/>
               </a:rPr>
-              <a:t>нет сетевых задержек и потерь, процессы делят процессор: выбросы 119–179 мс — сразу после перезапуска узла</a:t>
+              <a:t>нет сетевых задержек, процессы делят процессор с другими приложениями: сообщение по сессии 1,4–3,0 мс в разных прогонах одного кода</a:t>
             </a:r>
           </a:p>
         </p:txBody>
@@ -6689,7 +6689,7 @@
                 </a:solidFill>
                 <a:latin typeface="Calibri"/>
               </a:rPr>
-              <a:t>задаётся последовательным запуском процессов; star/run-04 = 14 с — два процесса стартовали по 1,9 с вместо 0,2 с</a:t>
+              <a:t>задаётся последовательным запуском 15 процессов (паузы 0,3 с); различие star и ring меньше разброса между запусками</a:t>
             </a:r>
           </a:p>
         </p:txBody>
@@ -10475,7 +10475,7 @@
                 </a:solidFill>
                 <a:latin typeface="Calibri"/>
               </a:rPr>
-              <a:t>Средний размер таблицы: 9,1 (star), 8,8 (ring); максимум 13 при N − 1 = 14</a:t>
+              <a:t>Средний размер таблицы: 9,1 (star), 8,8 (ring); максимум 12 при N − 1 = 14</a:t>
             </a:r>
           </a:p>
         </p:txBody>
@@ -13729,7 +13729,7 @@
                 </a:solidFill>
                 <a:latin typeface="Cambria"/>
               </a:rPr>
-              <a:t>35 мс</a:t>
+              <a:t>48 мс</a:t>
             </a:r>
           </a:p>
         </p:txBody>
@@ -13955,7 +13955,7 @@
                 </a:solidFill>
                 <a:latin typeface="Calibri"/>
               </a:rPr>
-              <a:t>соединения живы, видно только отсутствие ACK: 2 с тайм-аут + 1 с зонд ≈ 3,5 с</a:t>
+              <a:t>соединения живы, видно только отсутствие ACK: 2 с тайм-аут + зонд и такт контроля = 3,0–3,6 с</a:t>
             </a:r>
           </a:p>
           <a:p>
